--- a/assets/figures-editable/c3-c4/c4-e31.pptx
+++ b/assets/figures-editable/c3-c4/c4-e31.pptx
@@ -3104,8 +3104,8 @@
         </p:nvSpPr>
         <p:spPr>
           <a:xfrm>
-            <a:off x="274320" y="137160"/>
-            <a:ext cx="11612880" cy="365760"/>
+            <a:off x="274320" y="118872"/>
+            <a:ext cx="11612880" cy="340105"/>
           </a:xfrm>
           <a:prstGeom prst="rect">
             <a:avLst/>
@@ -3114,7 +3114,7 @@
           <a:effectLst/>
         </p:spPr>
         <p:txBody>
-          <a:bodyPr wrap="square" lIns="27432" rIns="27432" tIns="18288" bIns="18288" anchor="ctr">
+          <a:bodyPr wrap="none" lIns="18288" rIns="18288" tIns="18288" bIns="18288" anchor="t">
             <a:spAutoFit/>
           </a:bodyPr>
           <a:lstStyle/>
@@ -3125,7 +3125,7 @@
               </a:spcAft>
             </a:pPr>
             <a:r>
-              <a:rPr sz="2100" b="0" i="0">
+              <a:rPr sz="1900" b="1" i="0">
                 <a:solidFill>
                   <a:srgbClr val="8EDBD4"/>
                 </a:solidFill>
@@ -3138,46 +3138,14 @@
       </p:sp>
       <p:sp>
         <p:nvSpPr>
-          <p:cNvPr id="3" name="C4-E31 rect 1" descr="sci-ppt:o001"/>
-          <p:cNvSpPr/>
+          <p:cNvPr id="3" name="C4-E31 text 1" descr="sci-ppt:o001"/>
+          <p:cNvSpPr txBox="1"/>
           <p:nvPr/>
         </p:nvSpPr>
         <p:spPr>
           <a:xfrm>
-            <a:off x="594360" y="1417320"/>
-            <a:ext cx="3200400" cy="1325880"/>
-          </a:xfrm>
-          <a:prstGeom prst="rect">
-            <a:avLst/>
-          </a:prstGeom>
-          <a:solidFill>
-            <a:srgbClr val="213E4B"/>
-          </a:solidFill>
-          <a:ln w="19050">
-            <a:solidFill>
-              <a:srgbClr val="B4C7D2"/>
-            </a:solidFill>
-          </a:ln>
-          <a:effectLst/>
-        </p:spPr>
-        <p:txBody>
-          <a:bodyPr rtlCol="0" anchor="ctr"/>
-          <a:lstStyle/>
-          <a:p>
-            <a:pPr algn="ctr"/>
-          </a:p>
-        </p:txBody>
-      </p:sp>
-      <p:sp>
-        <p:nvSpPr>
-          <p:cNvPr id="4" name="C4-E31 text 2" descr="sci-ppt:o002"/>
-          <p:cNvSpPr txBox="1"/>
-          <p:nvPr/>
-        </p:nvSpPr>
-        <p:spPr>
-          <a:xfrm>
-            <a:off x="758952" y="1627632"/>
-            <a:ext cx="2871216" cy="914400"/>
+            <a:off x="457200" y="914400"/>
+            <a:ext cx="11247120" cy="254889"/>
           </a:xfrm>
           <a:prstGeom prst="rect">
             <a:avLst/>
@@ -3186,7 +3154,7 @@
           <a:effectLst/>
         </p:spPr>
         <p:txBody>
-          <a:bodyPr wrap="square" lIns="27432" rIns="27432" tIns="18288" bIns="18288" anchor="ctr">
+          <a:bodyPr wrap="none" lIns="18288" rIns="18288" tIns="18288" bIns="18288" anchor="t">
             <a:spAutoFit/>
           </a:bodyPr>
           <a:lstStyle/>
@@ -3197,83 +3165,27 @@
               </a:spcAft>
             </a:pPr>
             <a:r>
-              <a:rPr sz="1800" b="0" i="0">
+              <a:rPr sz="1350" b="1" i="0">
                 <a:solidFill>
-                  <a:srgbClr val="E7F0F3"/>
+                  <a:srgbClr val="8EDBD4"/>
                 </a:solidFill>
                 <a:latin typeface="Arial"/>
               </a:rPr>
-              <a:t>Incoming finite budgets</a:t>
-            </a:r>
-          </a:p>
-        </p:txBody>
-      </p:sp>
-      <p:cxnSp>
-        <p:nvCxnSpPr>
-          <p:cNvPr id="5" name="C4-E31 arrow 3" descr="sci-ppt:o003"/>
-          <p:cNvCxnSpPr/>
+              <a:t>Failed release-energy screen: Γ = 0.020 J/m²</a:t>
+            </a:r>
+          </a:p>
+        </p:txBody>
+      </p:sp>
+      <p:sp>
+        <p:nvSpPr>
+          <p:cNvPr id="4" name="C4-E31 text 2" descr="sci-ppt:o002"/>
+          <p:cNvSpPr txBox="1"/>
           <p:nvPr/>
-        </p:nvCxnSpPr>
+        </p:nvSpPr>
         <p:spPr>
           <a:xfrm>
-            <a:off x="3794760" y="2057400"/>
-            <a:ext cx="640080" cy="0"/>
-          </a:xfrm>
-          <a:prstGeom prst="line">
-            <a:avLst/>
-          </a:prstGeom>
-          <a:ln w="25400">
-            <a:solidFill>
-              <a:srgbClr val="8EDBD4"/>
-            </a:solidFill>
-            <a:headEnd type="none" w="med" len="med"/>
-            <a:tailEnd type="triangle" w="med" len="med"/>
-          </a:ln>
-          <a:effectLst/>
-        </p:spPr>
-      </p:cxnSp>
-      <p:sp>
-        <p:nvSpPr>
-          <p:cNvPr id="6" name="C4-E31 rect 4" descr="sci-ppt:o004"/>
-          <p:cNvSpPr/>
-          <p:nvPr/>
-        </p:nvSpPr>
-        <p:spPr>
-          <a:xfrm>
-            <a:off x="4480560" y="1417320"/>
-            <a:ext cx="3200400" cy="1325880"/>
-          </a:xfrm>
-          <a:prstGeom prst="rect">
-            <a:avLst/>
-          </a:prstGeom>
-          <a:solidFill>
-            <a:srgbClr val="213E4B"/>
-          </a:solidFill>
-          <a:ln w="19050">
-            <a:solidFill>
-              <a:srgbClr val="B4C7D2"/>
-            </a:solidFill>
-          </a:ln>
-          <a:effectLst/>
-        </p:spPr>
-        <p:txBody>
-          <a:bodyPr rtlCol="0" anchor="ctr"/>
-          <a:lstStyle/>
-          <a:p>
-            <a:pPr algn="ctr"/>
-          </a:p>
-        </p:txBody>
-      </p:sp>
-      <p:sp>
-        <p:nvSpPr>
-          <p:cNvPr id="7" name="C4-E31 text 5" descr="sci-ppt:o005"/>
-          <p:cNvSpPr txBox="1"/>
-          <p:nvPr/>
-        </p:nvSpPr>
-        <p:spPr>
-          <a:xfrm>
-            <a:off x="4645152" y="1627632"/>
-            <a:ext cx="2871216" cy="914400"/>
+            <a:off x="457200" y="1572768"/>
+            <a:ext cx="3566160" cy="247142"/>
           </a:xfrm>
           <a:prstGeom prst="rect">
             <a:avLst/>
@@ -3282,7 +3194,7 @@
           <a:effectLst/>
         </p:spPr>
         <p:txBody>
-          <a:bodyPr wrap="square" lIns="27432" rIns="27432" tIns="18288" bIns="18288" anchor="ctr">
+          <a:bodyPr wrap="none" lIns="18288" rIns="18288" tIns="18288" bIns="18288" anchor="t">
             <a:spAutoFit/>
           </a:bodyPr>
           <a:lstStyle/>
@@ -3293,61 +3205,41 @@
               </a:spcAft>
             </a:pPr>
             <a:r>
-              <a:rPr sz="1800" b="0" i="0">
+              <a:rPr sz="1300" b="0" i="0">
                 <a:solidFill>
                   <a:srgbClr val="E7F0F3"/>
                 </a:solidFill>
                 <a:latin typeface="Arial"/>
               </a:rPr>
-              <a:t>Transmitted E_solid, I_net</a:t>
-            </a:r>
-          </a:p>
-        </p:txBody>
-      </p:sp>
-      <p:cxnSp>
-        <p:nvCxnSpPr>
-          <p:cNvPr id="8" name="C4-E31 arrow 6" descr="sci-ppt:o006"/>
-          <p:cNvCxnSpPr/>
+              <a:t>energy needed  Γ A_f</a:t>
+            </a:r>
+          </a:p>
+        </p:txBody>
+      </p:sp>
+      <p:sp>
+        <p:nvSpPr>
+          <p:cNvPr id="5" name="C4-E31 rect 3" descr="sci-ppt:o003"/>
+          <p:cNvSpPr/>
           <p:nvPr/>
-        </p:nvCxnSpPr>
+        </p:nvSpPr>
         <p:spPr>
           <a:xfrm>
-            <a:off x="7680960" y="2057400"/>
-            <a:ext cx="640080" cy="0"/>
-          </a:xfrm>
-          <a:prstGeom prst="line">
-            <a:avLst/>
-          </a:prstGeom>
-          <a:ln w="25400">
-            <a:solidFill>
-              <a:srgbClr val="8EDBD4"/>
-            </a:solidFill>
-            <a:headEnd type="none" w="med" len="med"/>
-            <a:tailEnd type="triangle" w="med" len="med"/>
-          </a:ln>
-          <a:effectLst/>
-        </p:spPr>
-      </p:cxnSp>
-      <p:sp>
-        <p:nvSpPr>
-          <p:cNvPr id="9" name="C4-E31 rect 7" descr="sci-ppt:o007"/>
-          <p:cNvSpPr/>
-          <p:nvPr/>
-        </p:nvSpPr>
-        <p:spPr>
-          <a:xfrm>
-            <a:off x="8366760" y="1417320"/>
-            <a:ext cx="3200400" cy="1325880"/>
+            <a:off x="4114800" y="1554480"/>
+            <a:ext cx="5257800" cy="548640"/>
           </a:xfrm>
           <a:prstGeom prst="rect">
             <a:avLst/>
           </a:prstGeom>
           <a:solidFill>
-            <a:srgbClr val="213E4B"/>
+            <a:srgbClr val="F28BA0">
+              <a:alpha val="85000"/>
+            </a:srgbClr>
           </a:solidFill>
-          <a:ln w="19050">
+          <a:ln w="12700">
             <a:solidFill>
-              <a:srgbClr val="B4C7D2"/>
+              <a:srgbClr val="F28BA0">
+                <a:alpha val="85000"/>
+              </a:srgbClr>
             </a:solidFill>
           </a:ln>
           <a:effectLst/>
@@ -3362,14 +3254,14 @@
       </p:sp>
       <p:sp>
         <p:nvSpPr>
-          <p:cNvPr id="10" name="C4-E31 text 8" descr="sci-ppt:o008"/>
+          <p:cNvPr id="6" name="C4-E31 text 4" descr="sci-ppt:o004"/>
           <p:cNvSpPr txBox="1"/>
           <p:nvPr/>
         </p:nvSpPr>
         <p:spPr>
           <a:xfrm>
-            <a:off x="8531352" y="1627632"/>
-            <a:ext cx="2871216" cy="914400"/>
+            <a:off x="9445752" y="1600200"/>
+            <a:ext cx="1371600" cy="247142"/>
           </a:xfrm>
           <a:prstGeom prst="rect">
             <a:avLst/>
@@ -3378,7 +3270,7 @@
           <a:effectLst/>
         </p:spPr>
         <p:txBody>
-          <a:bodyPr wrap="square" lIns="27432" rIns="27432" tIns="18288" bIns="18288" anchor="ctr">
+          <a:bodyPr wrap="none" lIns="18288" rIns="18288" tIns="18288" bIns="18288" anchor="t">
             <a:spAutoFit/>
           </a:bodyPr>
           <a:lstStyle/>
@@ -3389,27 +3281,27 @@
               </a:spcAft>
             </a:pPr>
             <a:r>
-              <a:rPr sz="1800" b="0" i="0">
+              <a:rPr sz="1300" b="1" i="0">
                 <a:solidFill>
                   <a:srgbClr val="E7F0F3"/>
                 </a:solidFill>
                 <a:latin typeface="Arial"/>
               </a:rPr>
-              <a:t>Release + departure cost</a:t>
-            </a:r>
-          </a:p>
-        </p:txBody>
-      </p:sp>
-      <p:sp>
-        <p:nvSpPr>
-          <p:cNvPr id="11" name="C4-E31 text 9" descr="sci-ppt:o009"/>
+              <a:t>20.0 nJ</a:t>
+            </a:r>
+          </a:p>
+        </p:txBody>
+      </p:sp>
+      <p:sp>
+        <p:nvSpPr>
+          <p:cNvPr id="7" name="C4-E31 text 5" descr="sci-ppt:o005"/>
           <p:cNvSpPr txBox="1"/>
           <p:nvPr/>
         </p:nvSpPr>
         <p:spPr>
           <a:xfrm>
-            <a:off x="731520" y="3246120"/>
-            <a:ext cx="10789920" cy="457200"/>
+            <a:off x="457200" y="2441448"/>
+            <a:ext cx="3566160" cy="247142"/>
           </a:xfrm>
           <a:prstGeom prst="rect">
             <a:avLst/>
@@ -3418,7 +3310,7 @@
           <a:effectLst/>
         </p:spPr>
         <p:txBody>
-          <a:bodyPr wrap="square" lIns="27432" rIns="27432" tIns="18288" bIns="18288" anchor="ctr">
+          <a:bodyPr wrap="none" lIns="18288" rIns="18288" tIns="18288" bIns="18288" anchor="t">
             <a:spAutoFit/>
           </a:bodyPr>
           <a:lstStyle/>
@@ -3429,49 +3321,63 @@
               </a:spcAft>
             </a:pPr>
             <a:r>
-              <a:rPr sz="1800" b="0" i="0">
+              <a:rPr sz="1300" b="0" i="0">
                 <a:solidFill>
-                  <a:srgbClr val="8EDBD4"/>
+                  <a:srgbClr val="E7F0F3"/>
                 </a:solidFill>
                 <a:latin typeface="Arial"/>
               </a:rPr>
-              <a:t>Work, storage, fracture consumption and net impulse retain separate meanings.</a:t>
-            </a:r>
-          </a:p>
-        </p:txBody>
-      </p:sp>
-      <p:cxnSp>
-        <p:nvCxnSpPr>
-          <p:cNvPr id="12" name="C4-E31 line 10" descr="sci-ppt:o010"/>
-          <p:cNvCxnSpPr/>
+              <a:t>energy available  E_solid</a:t>
+            </a:r>
+          </a:p>
+        </p:txBody>
+      </p:sp>
+      <p:sp>
+        <p:nvSpPr>
+          <p:cNvPr id="8" name="C4-E31 rect 6" descr="sci-ppt:o006"/>
+          <p:cNvSpPr/>
           <p:nvPr/>
-        </p:nvCxnSpPr>
+        </p:nvSpPr>
         <p:spPr>
           <a:xfrm>
-            <a:off x="274320" y="3977639"/>
-            <a:ext cx="11612880" cy="0"/>
+            <a:off x="4114800" y="2423160"/>
+            <a:ext cx="2628900" cy="548640"/>
           </a:xfrm>
-          <a:prstGeom prst="line">
+          <a:prstGeom prst="rect">
             <a:avLst/>
           </a:prstGeom>
+          <a:solidFill>
+            <a:srgbClr val="8EDBD4">
+              <a:alpha val="85000"/>
+            </a:srgbClr>
+          </a:solidFill>
           <a:ln w="12700">
             <a:solidFill>
-              <a:srgbClr val="405967"/>
+              <a:srgbClr val="8EDBD4">
+                <a:alpha val="85000"/>
+              </a:srgbClr>
             </a:solidFill>
           </a:ln>
           <a:effectLst/>
         </p:spPr>
-      </p:cxnSp>
-      <p:sp>
-        <p:nvSpPr>
-          <p:cNvPr id="13" name="C4-E31 text 11" descr="sci-ppt:o011"/>
+        <p:txBody>
+          <a:bodyPr rtlCol="0" anchor="ctr"/>
+          <a:lstStyle/>
+          <a:p>
+            <a:pPr algn="ctr"/>
+          </a:p>
+        </p:txBody>
+      </p:sp>
+      <p:sp>
+        <p:nvSpPr>
+          <p:cNvPr id="9" name="C4-E31 text 7" descr="sci-ppt:o007"/>
           <p:cNvSpPr txBox="1"/>
           <p:nvPr/>
         </p:nvSpPr>
         <p:spPr>
           <a:xfrm>
-            <a:off x="320040" y="4096512"/>
-            <a:ext cx="5715000" cy="246888"/>
+            <a:off x="6816852" y="2468879"/>
+            <a:ext cx="1371600" cy="247142"/>
           </a:xfrm>
           <a:prstGeom prst="rect">
             <a:avLst/>
@@ -3480,7 +3386,7 @@
           <a:effectLst/>
         </p:spPr>
         <p:txBody>
-          <a:bodyPr wrap="square" lIns="27432" rIns="27432" tIns="18288" bIns="18288" anchor="ctr">
+          <a:bodyPr wrap="none" lIns="18288" rIns="18288" tIns="18288" bIns="18288" anchor="t">
             <a:spAutoFit/>
           </a:bodyPr>
           <a:lstStyle/>
@@ -3491,27 +3397,59 @@
               </a:spcAft>
             </a:pPr>
             <a:r>
-              <a:rPr sz="1150" b="0" i="0">
+              <a:rPr sz="1300" b="1" i="0">
                 <a:solidFill>
-                  <a:srgbClr val="B4C7D2"/>
+                  <a:srgbClr val="E7F0F3"/>
                 </a:solidFill>
                 <a:latin typeface="Arial"/>
               </a:rPr>
-              <a:t>• Γ = 0.020 J/m²</a:t>
-            </a:r>
-          </a:p>
-        </p:txBody>
-      </p:sp>
-      <p:sp>
-        <p:nvSpPr>
-          <p:cNvPr id="14" name="C4-E31 text 12" descr="sci-ppt:o012"/>
+              <a:t>10.0 nJ</a:t>
+            </a:r>
+          </a:p>
+        </p:txBody>
+      </p:sp>
+      <p:sp>
+        <p:nvSpPr>
+          <p:cNvPr id="10" name="C4-E31 round_rect 8" descr="sci-ppt:o008"/>
+          <p:cNvSpPr/>
+          <p:nvPr/>
+        </p:nvSpPr>
+        <p:spPr>
+          <a:xfrm>
+            <a:off x="457200" y="3566160"/>
+            <a:ext cx="5486400" cy="2103120"/>
+          </a:xfrm>
+          <a:prstGeom prst="roundRect">
+            <a:avLst/>
+          </a:prstGeom>
+          <a:solidFill>
+            <a:srgbClr val="213E4B"/>
+          </a:solidFill>
+          <a:ln w="20320">
+            <a:solidFill>
+              <a:srgbClr val="8EDBD4"/>
+            </a:solidFill>
+          </a:ln>
+          <a:effectLst/>
+        </p:spPr>
+        <p:txBody>
+          <a:bodyPr rtlCol="0" anchor="ctr"/>
+          <a:lstStyle/>
+          <a:p>
+            <a:pPr algn="ctr"/>
+          </a:p>
+        </p:txBody>
+      </p:sp>
+      <p:sp>
+        <p:nvSpPr>
+          <p:cNvPr id="11" name="C4-E31 text 9" descr="sci-ppt:o009"/>
           <p:cNvSpPr txBox="1"/>
           <p:nvPr/>
         </p:nvSpPr>
         <p:spPr>
           <a:xfrm>
-            <a:off x="6217920" y="4096512"/>
-            <a:ext cx="5715000" cy="246888"/>
+            <a:off x="566928" y="3621024"/>
+            <a:ext cx="5266944" cy="247142"/>
           </a:xfrm>
           <a:prstGeom prst="rect">
             <a:avLst/>
@@ -3520,7 +3458,7 @@
           <a:effectLst/>
         </p:spPr>
         <p:txBody>
-          <a:bodyPr wrap="square" lIns="27432" rIns="27432" tIns="18288" bIns="18288" anchor="ctr">
+          <a:bodyPr wrap="none" lIns="18288" rIns="18288" tIns="18288" bIns="18288" anchor="t">
             <a:spAutoFit/>
           </a:bodyPr>
           <a:lstStyle/>
@@ -3531,27 +3469,27 @@
               </a:spcAft>
             </a:pPr>
             <a:r>
-              <a:rPr sz="1150" b="0" i="0">
+              <a:rPr sz="1300" b="1" i="0">
                 <a:solidFill>
-                  <a:srgbClr val="B4C7D2"/>
+                  <a:srgbClr val="8EDBD4"/>
                 </a:solidFill>
                 <a:latin typeface="Arial"/>
               </a:rPr>
-              <a:t>• A_f = 1 mm²</a:t>
-            </a:r>
-          </a:p>
-        </p:txBody>
-      </p:sp>
-      <p:sp>
-        <p:nvSpPr>
-          <p:cNvPr id="15" name="C4-E31 text 13" descr="sci-ppt:o013"/>
+              <a:t>Arithmetic</a:t>
+            </a:r>
+          </a:p>
+        </p:txBody>
+      </p:sp>
+      <p:sp>
+        <p:nvSpPr>
+          <p:cNvPr id="12" name="C4-E31 text 10" descr="sci-ppt:o010"/>
           <p:cNvSpPr txBox="1"/>
           <p:nvPr/>
         </p:nvSpPr>
         <p:spPr>
           <a:xfrm>
-            <a:off x="320040" y="4329684"/>
-            <a:ext cx="5715000" cy="246888"/>
+            <a:off x="594360" y="4023360"/>
+            <a:ext cx="5212080" cy="239395"/>
           </a:xfrm>
           <a:prstGeom prst="rect">
             <a:avLst/>
@@ -3560,7 +3498,7 @@
           <a:effectLst/>
         </p:spPr>
         <p:txBody>
-          <a:bodyPr wrap="square" lIns="27432" rIns="27432" tIns="18288" bIns="18288" anchor="ctr">
+          <a:bodyPr wrap="none" lIns="18288" rIns="18288" tIns="18288" bIns="18288" anchor="t">
             <a:spAutoFit/>
           </a:bodyPr>
           <a:lstStyle/>
@@ -3571,27 +3509,27 @@
               </a:spcAft>
             </a:pPr>
             <a:r>
-              <a:rPr sz="1150" b="0" i="0">
+              <a:rPr sz="1250" b="1" i="0">
                 <a:solidFill>
-                  <a:srgbClr val="B4C7D2"/>
+                  <a:srgbClr val="E7F0F3"/>
                 </a:solidFill>
                 <a:latin typeface="Arial"/>
               </a:rPr>
-              <a:t>• ΓA_f = 20 nJ — required release</a:t>
-            </a:r>
-          </a:p>
-        </p:txBody>
-      </p:sp>
-      <p:sp>
-        <p:nvSpPr>
-          <p:cNvPr id="16" name="C4-E31 text 14" descr="sci-ppt:o014"/>
+              <a:t>Γ A_f = (0.020)(1.00×10⁻⁶) J = 20.0 nJ</a:t>
+            </a:r>
+          </a:p>
+        </p:txBody>
+      </p:sp>
+      <p:sp>
+        <p:nvSpPr>
+          <p:cNvPr id="13" name="C4-E31 text 11" descr="sci-ppt:o011"/>
           <p:cNvSpPr txBox="1"/>
           <p:nvPr/>
         </p:nvSpPr>
         <p:spPr>
           <a:xfrm>
-            <a:off x="6217920" y="4329684"/>
-            <a:ext cx="5715000" cy="246888"/>
+            <a:off x="594360" y="4572000"/>
+            <a:ext cx="5212080" cy="262636"/>
           </a:xfrm>
           <a:prstGeom prst="rect">
             <a:avLst/>
@@ -3600,7 +3538,7 @@
           <a:effectLst/>
         </p:spPr>
         <p:txBody>
-          <a:bodyPr wrap="square" lIns="27432" rIns="27432" tIns="18288" bIns="18288" anchor="ctr">
+          <a:bodyPr wrap="none" lIns="18288" rIns="18288" tIns="18288" bIns="18288" anchor="t">
             <a:spAutoFit/>
           </a:bodyPr>
           <a:lstStyle/>
@@ -3611,27 +3549,59 @@
               </a:spcAft>
             </a:pPr>
             <a:r>
-              <a:rPr sz="1150" b="0" i="0">
+              <a:rPr sz="1400" b="1" i="0">
                 <a:solidFill>
-                  <a:srgbClr val="B4C7D2"/>
+                  <a:srgbClr val="F28BA0"/>
                 </a:solidFill>
                 <a:latin typeface="Arial"/>
               </a:rPr>
-              <a:t>• E_solid = 10 nJ — available</a:t>
-            </a:r>
-          </a:p>
-        </p:txBody>
-      </p:sp>
-      <p:sp>
-        <p:nvSpPr>
-          <p:cNvPr id="17" name="C4-E31 text 15" descr="sci-ppt:o015"/>
+              <a:t>20.0 nJ  &gt;  E_solid = 10.0 nJ</a:t>
+            </a:r>
+          </a:p>
+        </p:txBody>
+      </p:sp>
+      <p:sp>
+        <p:nvSpPr>
+          <p:cNvPr id="14" name="C4-E31 round_rect 12" descr="sci-ppt:o012"/>
+          <p:cNvSpPr/>
+          <p:nvPr/>
+        </p:nvSpPr>
+        <p:spPr>
+          <a:xfrm>
+            <a:off x="6217920" y="3566160"/>
+            <a:ext cx="5486400" cy="2103120"/>
+          </a:xfrm>
+          <a:prstGeom prst="roundRect">
+            <a:avLst/>
+          </a:prstGeom>
+          <a:solidFill>
+            <a:srgbClr val="213E4B"/>
+          </a:solidFill>
+          <a:ln w="20320">
+            <a:solidFill>
+              <a:srgbClr val="F28BA0"/>
+            </a:solidFill>
+          </a:ln>
+          <a:effectLst/>
+        </p:spPr>
+        <p:txBody>
+          <a:bodyPr rtlCol="0" anchor="ctr"/>
+          <a:lstStyle/>
+          <a:p>
+            <a:pPr algn="ctr"/>
+          </a:p>
+        </p:txBody>
+      </p:sp>
+      <p:sp>
+        <p:nvSpPr>
+          <p:cNvPr id="15" name="C4-E31 text 13" descr="sci-ppt:o013"/>
           <p:cNvSpPr txBox="1"/>
           <p:nvPr/>
         </p:nvSpPr>
         <p:spPr>
           <a:xfrm>
-            <a:off x="320040" y="4562856"/>
-            <a:ext cx="5715000" cy="246888"/>
+            <a:off x="6327648" y="3621024"/>
+            <a:ext cx="5266944" cy="247142"/>
           </a:xfrm>
           <a:prstGeom prst="rect">
             <a:avLst/>
@@ -3640,7 +3610,7 @@
           <a:effectLst/>
         </p:spPr>
         <p:txBody>
-          <a:bodyPr wrap="square" lIns="27432" rIns="27432" tIns="18288" bIns="18288" anchor="ctr">
+          <a:bodyPr wrap="none" lIns="18288" rIns="18288" tIns="18288" bIns="18288" anchor="t">
             <a:spAutoFit/>
           </a:bodyPr>
           <a:lstStyle/>
@@ -3651,27 +3621,27 @@
               </a:spcAft>
             </a:pPr>
             <a:r>
-              <a:rPr sz="1150" b="0" i="0">
+              <a:rPr sz="1300" b="1" i="0">
                 <a:solidFill>
-                  <a:srgbClr val="B4C7D2"/>
+                  <a:srgbClr val="F28BA0"/>
                 </a:solidFill>
                 <a:latin typeface="Arial"/>
               </a:rPr>
-              <a:t>• early rigid impact ≈ 47.23 MPa</a:t>
-            </a:r>
-          </a:p>
-        </p:txBody>
-      </p:sp>
-      <p:sp>
-        <p:nvSpPr>
-          <p:cNvPr id="18" name="C4-E31 text 16" descr="sci-ppt:o016"/>
+              <a:t>Verdict</a:t>
+            </a:r>
+          </a:p>
+        </p:txBody>
+      </p:sp>
+      <p:sp>
+        <p:nvSpPr>
+          <p:cNvPr id="16" name="C4-E31 text 14" descr="sci-ppt:o014"/>
           <p:cNvSpPr txBox="1"/>
           <p:nvPr/>
         </p:nvSpPr>
         <p:spPr>
           <a:xfrm>
-            <a:off x="320040" y="5596128"/>
-            <a:ext cx="11430000" cy="292608"/>
+            <a:off x="6355080" y="4023360"/>
+            <a:ext cx="5212080" cy="448563"/>
           </a:xfrm>
           <a:prstGeom prst="rect">
             <a:avLst/>
@@ -3680,7 +3650,7 @@
           <a:effectLst/>
         </p:spPr>
         <p:txBody>
-          <a:bodyPr wrap="square" lIns="27432" rIns="27432" tIns="18288" bIns="18288" anchor="ctr">
+          <a:bodyPr wrap="none" lIns="18288" rIns="18288" tIns="18288" bIns="18288" anchor="t">
             <a:spAutoFit/>
           </a:bodyPr>
           <a:lstStyle/>
@@ -3691,27 +3661,43 @@
               </a:spcAft>
             </a:pPr>
             <a:r>
-              <a:rPr sz="1150" b="0" i="0">
+              <a:rPr sz="1300" b="1" i="0">
                 <a:solidFill>
-                  <a:srgbClr val="8EDBD4"/>
+                  <a:srgbClr val="F2B880"/>
                 </a:solidFill>
                 <a:latin typeface="Arial"/>
               </a:rPr>
-              <a:t>High local pressure coexists with insufficient total release work.</a:t>
-            </a:r>
-          </a:p>
-        </p:txBody>
-      </p:sp>
-      <p:sp>
-        <p:nvSpPr>
-          <p:cNvPr id="19" name="C4-E31 text 17" descr="sci-ppt:o017"/>
+              <a:t>FAIL: the assigned source cannot release the whole</a:t>
+            </a:r>
+          </a:p>
+          <a:p>
+            <a:pPr algn="l">
+              <a:spcAft>
+                <a:spcPts val="0"/>
+              </a:spcAft>
+            </a:pPr>
+            <a:r>
+              <a:rPr sz="1300" b="1" i="0">
+                <a:solidFill>
+                  <a:srgbClr val="F2B880"/>
+                </a:solidFill>
+                <a:latin typeface="Arial"/>
+              </a:rPr>
+              <a:t>interface even before adding departure energy.</a:t>
+            </a:r>
+          </a:p>
+        </p:txBody>
+      </p:sp>
+      <p:sp>
+        <p:nvSpPr>
+          <p:cNvPr id="17" name="C4-E31 text 15" descr="sci-ppt:o015"/>
           <p:cNvSpPr txBox="1"/>
           <p:nvPr/>
         </p:nvSpPr>
         <p:spPr>
           <a:xfrm>
-            <a:off x="320040" y="6473952"/>
-            <a:ext cx="11430000" cy="256032"/>
+            <a:off x="6355080" y="4937760"/>
+            <a:ext cx="5212080" cy="223900"/>
           </a:xfrm>
           <a:prstGeom prst="rect">
             <a:avLst/>
@@ -3720,7 +3706,47 @@
           <a:effectLst/>
         </p:spPr>
         <p:txBody>
-          <a:bodyPr wrap="square" lIns="27432" rIns="27432" tIns="18288" bIns="18288" anchor="ctr">
+          <a:bodyPr wrap="none" lIns="18288" rIns="18288" tIns="18288" bIns="18288" anchor="t">
+            <a:spAutoFit/>
+          </a:bodyPr>
+          <a:lstStyle/>
+          <a:p>
+            <a:pPr algn="l">
+              <a:spcAft>
+                <a:spcPts val="0"/>
+              </a:spcAft>
+            </a:pPr>
+            <a:r>
+              <a:rPr sz="1150" b="0" i="0">
+                <a:solidFill>
+                  <a:srgbClr val="B4C7D2"/>
+                </a:solidFill>
+                <a:latin typeface="Arial"/>
+              </a:rPr>
+              <a:t>The failure is for this declared Γ and η_E.</a:t>
+            </a:r>
+          </a:p>
+        </p:txBody>
+      </p:sp>
+      <p:sp>
+        <p:nvSpPr>
+          <p:cNvPr id="18" name="C4-E31 text 16" descr="sci-ppt:o016"/>
+          <p:cNvSpPr txBox="1"/>
+          <p:nvPr/>
+        </p:nvSpPr>
+        <p:spPr>
+          <a:xfrm>
+            <a:off x="320040" y="6510528"/>
+            <a:ext cx="11521440" cy="200660"/>
+          </a:xfrm>
+          <a:prstGeom prst="rect">
+            <a:avLst/>
+          </a:prstGeom>
+          <a:noFill/>
+          <a:effectLst/>
+        </p:spPr>
+        <p:txBody>
+          <a:bodyPr wrap="none" lIns="18288" rIns="18288" tIns="18288" bIns="18288" anchor="t">
             <a:spAutoFit/>
           </a:bodyPr>
           <a:lstStyle/>
@@ -3737,7 +3763,7 @@
                 </a:solidFill>
                 <a:latin typeface="Arial"/>
               </a:rPr>
-              <a:t>Model schematic; geometry is not to scale.</a:t>
+              <a:t>Failed screen of Eq. C4-E31.</a:t>
             </a:r>
           </a:p>
         </p:txBody>
